--- a/classes/parte-6-analisis-de-malware/151-rootkits-y-bootkits/clase-151-presentacion.pptx
+++ b/classes/parte-6-analisis-de-malware/151-rootkits-y-bootkits/clase-151-presentacion.pptx
@@ -17,6 +17,9 @@
     <p:sldId id="265" r:id="rId16"/>
     <p:sldId id="266" r:id="rId17"/>
     <p:sldId id="267" r:id="rId18"/>
+    <p:sldId id="268" r:id="rId19"/>
+    <p:sldId id="269" r:id="rId20"/>
+    <p:sldId id="270" r:id="rId21"/>
   </p:sldIdLst>
   <p:sldSz cx="9144000" cy="6858000" type="screen4x3"/>
   <p:notesSz cx="6858000" cy="9144000"/>
@@ -3198,7 +3201,7 @@
                   <a:srgbClr val="0B3D2E"/>
                 </a:solidFill>
               </a:rPr>
-              <a:t>⚠️ Errores comunes</a:t>
+              <a:t>✍️ Ejercicios</a:t>
             </a:r>
           </a:p>
         </p:txBody>
@@ -3236,67 +3239,82 @@
                   <a:srgbClr val="22282E"/>
                 </a:solidFill>
               </a:rPr>
-              <a:t>•  Herramientas en vivo "no ven nada" — El rootkit las engaña; usa forense de memoria offline</a:t>
-            </a:r>
-          </a:p>
-          <a:p>
-            <a:pPr>
-              <a:spcAft>
-                <a:spcPts val="600"/>
-              </a:spcAft>
-            </a:pPr>
-            <a:r>
-              <a:rPr sz="1500">
-                <a:solidFill>
-                  <a:srgbClr val="22282E"/>
-                </a:solidFill>
-              </a:rPr>
-              <a:t>•  VM se cuelga al cargar el driver — Comportamiento esperado en kernel; trabaja con snapshot</a:t>
-            </a:r>
-          </a:p>
-          <a:p>
-            <a:pPr>
-              <a:spcAft>
-                <a:spcPts val="600"/>
-              </a:spcAft>
-            </a:pPr>
-            <a:r>
-              <a:rPr sz="1500">
-                <a:solidFill>
-                  <a:srgbClr val="22282E"/>
-                </a:solidFill>
-              </a:rPr>
-              <a:t>•  ssdt limpio pero algo se oculta — Puede ser DKOM o hooks inline; combina varias vistas</a:t>
-            </a:r>
-          </a:p>
-          <a:p>
-            <a:pPr>
-              <a:spcAft>
-                <a:spcPts val="600"/>
-              </a:spcAft>
-            </a:pPr>
-            <a:r>
-              <a:rPr sz="1500">
-                <a:solidFill>
-                  <a:srgbClr val="22282E"/>
-                </a:solidFill>
-              </a:rPr>
-              <a:t>•  Driver sospechoso pero firmado — Posible BYOVD; verifica CVE del driver, no solo la firma</a:t>
-            </a:r>
-          </a:p>
-          <a:p>
-            <a:pPr>
-              <a:spcAft>
-                <a:spcPts val="600"/>
-              </a:spcAft>
-            </a:pPr>
-            <a:r>
-              <a:rPr sz="1500">
-                <a:solidFill>
-                  <a:srgbClr val="22282E"/>
-                </a:solidFill>
-              </a:rPr>
-              <a:t>•  No hallo el bootkit — Revisa MBR/VBR y partición EFI, no solo el sistema de archivos</a:t>
+              <a:t>•  Explica la diferencia práctica entre un hook inline y DKOM.</a:t>
+            </a:r>
+          </a:p>
+          <a:p>
+            <a:pPr>
+              <a:spcAft>
+                <a:spcPts val="600"/>
+              </a:spcAft>
+            </a:pPr>
+            <a:r>
+              <a:rPr sz="1500">
+                <a:solidFill>
+                  <a:srgbClr val="22282E"/>
+                </a:solidFill>
+              </a:rPr>
+              <a:t>•  Interpreta un psxview con discrepancias y concluye qué está oculto.</a:t>
+            </a:r>
+          </a:p>
+          <a:p>
+            <a:pPr>
+              <a:spcAft>
+                <a:spcPts val="600"/>
+              </a:spcAft>
+            </a:pPr>
+            <a:r>
+              <a:rPr sz="1500">
+                <a:solidFill>
+                  <a:srgbClr val="22282E"/>
+                </a:solidFill>
+              </a:rPr>
+              <a:t>•  Analiza un driver .sys y localiza su rutina de ocultación.</a:t>
+            </a:r>
+          </a:p>
+          <a:p>
+            <a:pPr>
+              <a:spcAft>
+                <a:spcPts val="600"/>
+              </a:spcAft>
+            </a:pPr>
+            <a:r>
+              <a:rPr sz="1500">
+                <a:solidFill>
+                  <a:srgbClr val="22282E"/>
+                </a:solidFill>
+              </a:rPr>
+              <a:t>•  Describe cómo Secure Boot frena los bootkits UEFI.</a:t>
+            </a:r>
+          </a:p>
+          <a:p>
+            <a:pPr>
+              <a:spcAft>
+                <a:spcPts val="600"/>
+              </a:spcAft>
+            </a:pPr>
+            <a:r>
+              <a:rPr sz="1500">
+                <a:solidFill>
+                  <a:srgbClr val="22282E"/>
+                </a:solidFill>
+              </a:rPr>
+              <a:t>•  Explica BYOVD y por qué sigue funcionando pese a la firma obligatoria.</a:t>
+            </a:r>
+          </a:p>
+          <a:p>
+            <a:pPr>
+              <a:spcAft>
+                <a:spcPts val="600"/>
+              </a:spcAft>
+            </a:pPr>
+            <a:r>
+              <a:rPr sz="1500">
+                <a:solidFill>
+                  <a:srgbClr val="22282E"/>
+                </a:solidFill>
+              </a:rPr>
+              <a:t>•  Diseña una detección de carga de drivers vulnerables conocidos.</a:t>
             </a:r>
           </a:p>
         </p:txBody>
@@ -3347,7 +3365,7 @@
                   <a:srgbClr val="0B3D2E"/>
                 </a:solidFill>
               </a:rPr>
-              <a:t>❓ Preguntas frecuentes</a:t>
+              <a:t>📝 Reto verificable</a:t>
             </a:r>
           </a:p>
         </p:txBody>
@@ -3385,37 +3403,22 @@
                   <a:srgbClr val="22282E"/>
                 </a:solidFill>
               </a:rPr>
-              <a:t>•  ❓ ¿Por qué memoria y no disco? Porque el rootkit manipula el SO en ejecución; la memoria conserva la evidencia real que las APIs comprometidas ocultan.</a:t>
-            </a:r>
-          </a:p>
-          <a:p>
-            <a:pPr>
-              <a:spcAft>
-                <a:spcPts val="600"/>
-              </a:spcAft>
-            </a:pPr>
-            <a:r>
-              <a:rPr sz="1500">
-                <a:solidFill>
-                  <a:srgbClr val="22282E"/>
-                </a:solidFill>
-              </a:rPr>
-              <a:t>•  ❓ ¿Siguen siendo relevantes los bootkits? Sí, especialmente UEFI. Secure Boot ayuda, pero han aparecido bootkits que lo evaden con vulnerabilidades del firmware.</a:t>
-            </a:r>
-          </a:p>
-          <a:p>
-            <a:pPr>
-              <a:spcAft>
-                <a:spcPts val="600"/>
-              </a:spcAft>
-            </a:pPr>
-            <a:r>
-              <a:rPr sz="1500">
-                <a:solidFill>
-                  <a:srgbClr val="22282E"/>
-                </a:solidFill>
-              </a:rPr>
-              <a:t>•  ❓ ¿Cómo entran hoy al kernel? Con frecuencia vía BYOVD: cargan un driver firmado pero vulnerable para obtener ejecución en kernel sin necesitar su propio driver firmado.</a:t>
+              <a:t>•  Entrega un informe de rootkit identificando la técnica de ocultación con evidencia de memoria (cross-view/SSDT/driverscan), el artefacto oculto (proceso/conexión/driver) y una recomendación de…</a:t>
+            </a:r>
+          </a:p>
+          <a:p>
+            <a:pPr>
+              <a:spcAft>
+                <a:spcPts val="600"/>
+              </a:spcAft>
+            </a:pPr>
+            <a:r>
+              <a:rPr sz="1500">
+                <a:solidFill>
+                  <a:srgbClr val="22282E"/>
+                </a:solidFill>
+              </a:rPr>
+              <a:t>•  Criterio de aceptación: el informe muestra al menos una discrepancia cross-view o un hook/driver anómalo con la salida de Volatility que lo respalda, y explica por qué el análisis en disco/vivo no…</a:t>
             </a:r>
           </a:p>
         </p:txBody>
@@ -3466,7 +3469,7 @@
                   <a:srgbClr val="0B3D2E"/>
                 </a:solidFill>
               </a:rPr>
-              <a:t>🔗 Referencias</a:t>
+              <a:t>⚠️ Errores comunes</a:t>
             </a:r>
           </a:p>
         </p:txBody>
@@ -3504,6 +3507,274 @@
                   <a:srgbClr val="22282E"/>
                 </a:solidFill>
               </a:rPr>
+              <a:t>•  Herramientas en vivo "no ven nada" — El rootkit las engaña; usa forense de memoria offline</a:t>
+            </a:r>
+          </a:p>
+          <a:p>
+            <a:pPr>
+              <a:spcAft>
+                <a:spcPts val="600"/>
+              </a:spcAft>
+            </a:pPr>
+            <a:r>
+              <a:rPr sz="1500">
+                <a:solidFill>
+                  <a:srgbClr val="22282E"/>
+                </a:solidFill>
+              </a:rPr>
+              <a:t>•  VM se cuelga al cargar el driver — Comportamiento esperado en kernel; trabaja con snapshot</a:t>
+            </a:r>
+          </a:p>
+          <a:p>
+            <a:pPr>
+              <a:spcAft>
+                <a:spcPts val="600"/>
+              </a:spcAft>
+            </a:pPr>
+            <a:r>
+              <a:rPr sz="1500">
+                <a:solidFill>
+                  <a:srgbClr val="22282E"/>
+                </a:solidFill>
+              </a:rPr>
+              <a:t>•  ssdt limpio pero algo se oculta — Puede ser DKOM o hooks inline; combina varias vistas</a:t>
+            </a:r>
+          </a:p>
+          <a:p>
+            <a:pPr>
+              <a:spcAft>
+                <a:spcPts val="600"/>
+              </a:spcAft>
+            </a:pPr>
+            <a:r>
+              <a:rPr sz="1500">
+                <a:solidFill>
+                  <a:srgbClr val="22282E"/>
+                </a:solidFill>
+              </a:rPr>
+              <a:t>•  Driver sospechoso pero firmado — Posible BYOVD; verifica CVE del driver, no solo la firma</a:t>
+            </a:r>
+          </a:p>
+          <a:p>
+            <a:pPr>
+              <a:spcAft>
+                <a:spcPts val="600"/>
+              </a:spcAft>
+            </a:pPr>
+            <a:r>
+              <a:rPr sz="1500">
+                <a:solidFill>
+                  <a:srgbClr val="22282E"/>
+                </a:solidFill>
+              </a:rPr>
+              <a:t>•  No hallo el bootkit — Revisa MBR/VBR y partición EFI, no solo el sistema de archivos</a:t>
+            </a:r>
+          </a:p>
+        </p:txBody>
+      </p:sp>
+    </p:spTree>
+  </p:cSld>
+  <p:clrMapOvr>
+    <a:masterClrMapping/>
+  </p:clrMapOvr>
+</p:sld>
+</file>
+
+<file path=ppt/slides/slide13.xml><?xml version="1.0" encoding="utf-8"?>
+<p:sld xmlns:a="http://schemas.openxmlformats.org/drawingml/2006/main" xmlns:p="http://schemas.openxmlformats.org/presentationml/2006/main" xmlns:r="http://schemas.openxmlformats.org/officeDocument/2006/relationships">
+  <p:cSld>
+    <p:spTree>
+      <p:nvGrpSpPr>
+        <p:cNvPr id="1" name=""/>
+        <p:cNvGrpSpPr/>
+        <p:nvPr/>
+      </p:nvGrpSpPr>
+      <p:grpSpPr/>
+      <p:sp>
+        <p:nvSpPr>
+          <p:cNvPr id="2" name="TextBox 1"/>
+          <p:cNvSpPr txBox="1"/>
+          <p:nvPr/>
+        </p:nvSpPr>
+        <p:spPr>
+          <a:xfrm>
+            <a:off x="457200" y="320040"/>
+            <a:ext cx="8229600" cy="822960"/>
+          </a:xfrm>
+          <a:prstGeom prst="rect">
+            <a:avLst/>
+          </a:prstGeom>
+          <a:noFill/>
+        </p:spPr>
+        <p:txBody>
+          <a:bodyPr wrap="square">
+            <a:spAutoFit/>
+          </a:bodyPr>
+          <a:lstStyle/>
+          <a:p>
+            <a:r>
+              <a:rPr sz="2600" b="1">
+                <a:solidFill>
+                  <a:srgbClr val="0B3D2E"/>
+                </a:solidFill>
+              </a:rPr>
+              <a:t>❓ Preguntas frecuentes</a:t>
+            </a:r>
+          </a:p>
+        </p:txBody>
+      </p:sp>
+      <p:sp>
+        <p:nvSpPr>
+          <p:cNvPr id="3" name="TextBox 2"/>
+          <p:cNvSpPr txBox="1"/>
+          <p:nvPr/>
+        </p:nvSpPr>
+        <p:spPr>
+          <a:xfrm>
+            <a:off x="457200" y="1280160"/>
+            <a:ext cx="8229600" cy="4937760"/>
+          </a:xfrm>
+          <a:prstGeom prst="rect">
+            <a:avLst/>
+          </a:prstGeom>
+          <a:noFill/>
+        </p:spPr>
+        <p:txBody>
+          <a:bodyPr wrap="square">
+            <a:spAutoFit/>
+          </a:bodyPr>
+          <a:lstStyle/>
+          <a:p>
+            <a:pPr>
+              <a:spcAft>
+                <a:spcPts val="600"/>
+              </a:spcAft>
+            </a:pPr>
+            <a:r>
+              <a:rPr sz="1500">
+                <a:solidFill>
+                  <a:srgbClr val="22282E"/>
+                </a:solidFill>
+              </a:rPr>
+              <a:t>•  ❓ ¿Por qué memoria y no disco? Porque el rootkit manipula el SO en ejecución; la memoria conserva la evidencia real que las APIs comprometidas ocultan.</a:t>
+            </a:r>
+          </a:p>
+          <a:p>
+            <a:pPr>
+              <a:spcAft>
+                <a:spcPts val="600"/>
+              </a:spcAft>
+            </a:pPr>
+            <a:r>
+              <a:rPr sz="1500">
+                <a:solidFill>
+                  <a:srgbClr val="22282E"/>
+                </a:solidFill>
+              </a:rPr>
+              <a:t>•  ❓ ¿Siguen siendo relevantes los bootkits? Sí, especialmente UEFI. Secure Boot ayuda, pero han aparecido bootkits que lo evaden con vulnerabilidades del firmware.</a:t>
+            </a:r>
+          </a:p>
+          <a:p>
+            <a:pPr>
+              <a:spcAft>
+                <a:spcPts val="600"/>
+              </a:spcAft>
+            </a:pPr>
+            <a:r>
+              <a:rPr sz="1500">
+                <a:solidFill>
+                  <a:srgbClr val="22282E"/>
+                </a:solidFill>
+              </a:rPr>
+              <a:t>•  ❓ ¿Cómo entran hoy al kernel? Con frecuencia vía BYOVD: cargan un driver firmado pero vulnerable para obtener ejecución en kernel sin necesitar su propio driver firmado.</a:t>
+            </a:r>
+          </a:p>
+        </p:txBody>
+      </p:sp>
+    </p:spTree>
+  </p:cSld>
+  <p:clrMapOvr>
+    <a:masterClrMapping/>
+  </p:clrMapOvr>
+</p:sld>
+</file>
+
+<file path=ppt/slides/slide14.xml><?xml version="1.0" encoding="utf-8"?>
+<p:sld xmlns:a="http://schemas.openxmlformats.org/drawingml/2006/main" xmlns:p="http://schemas.openxmlformats.org/presentationml/2006/main" xmlns:r="http://schemas.openxmlformats.org/officeDocument/2006/relationships">
+  <p:cSld>
+    <p:spTree>
+      <p:nvGrpSpPr>
+        <p:cNvPr id="1" name=""/>
+        <p:cNvGrpSpPr/>
+        <p:nvPr/>
+      </p:nvGrpSpPr>
+      <p:grpSpPr/>
+      <p:sp>
+        <p:nvSpPr>
+          <p:cNvPr id="2" name="TextBox 1"/>
+          <p:cNvSpPr txBox="1"/>
+          <p:nvPr/>
+        </p:nvSpPr>
+        <p:spPr>
+          <a:xfrm>
+            <a:off x="457200" y="320040"/>
+            <a:ext cx="8229600" cy="822960"/>
+          </a:xfrm>
+          <a:prstGeom prst="rect">
+            <a:avLst/>
+          </a:prstGeom>
+          <a:noFill/>
+        </p:spPr>
+        <p:txBody>
+          <a:bodyPr wrap="square">
+            <a:spAutoFit/>
+          </a:bodyPr>
+          <a:lstStyle/>
+          <a:p>
+            <a:r>
+              <a:rPr sz="2600" b="1">
+                <a:solidFill>
+                  <a:srgbClr val="0B3D2E"/>
+                </a:solidFill>
+              </a:rPr>
+              <a:t>🔗 Referencias</a:t>
+            </a:r>
+          </a:p>
+        </p:txBody>
+      </p:sp>
+      <p:sp>
+        <p:nvSpPr>
+          <p:cNvPr id="3" name="TextBox 2"/>
+          <p:cNvSpPr txBox="1"/>
+          <p:nvPr/>
+        </p:nvSpPr>
+        <p:spPr>
+          <a:xfrm>
+            <a:off x="457200" y="1280160"/>
+            <a:ext cx="8229600" cy="4937760"/>
+          </a:xfrm>
+          <a:prstGeom prst="rect">
+            <a:avLst/>
+          </a:prstGeom>
+          <a:noFill/>
+        </p:spPr>
+        <p:txBody>
+          <a:bodyPr wrap="square">
+            <a:spAutoFit/>
+          </a:bodyPr>
+          <a:lstStyle/>
+          <a:p>
+            <a:pPr>
+              <a:spcAft>
+                <a:spcPts val="600"/>
+              </a:spcAft>
+            </a:pPr>
+            <a:r>
+              <a:rPr sz="1500">
+                <a:solidFill>
+                  <a:srgbClr val="22282E"/>
+                </a:solidFill>
+              </a:rPr>
               <a:t>•  Ligh et al., The Art of Memory Forensics.</a:t>
             </a:r>
           </a:p>
@@ -3554,6 +3825,81 @@
           </a:p>
         </p:txBody>
       </p:sp>
+    </p:spTree>
+  </p:cSld>
+  <p:clrMapOvr>
+    <a:masterClrMapping/>
+  </p:clrMapOvr>
+</p:sld>
+</file>
+
+<file path=ppt/slides/slide15.xml><?xml version="1.0" encoding="utf-8"?>
+<p:sld xmlns:a="http://schemas.openxmlformats.org/drawingml/2006/main" xmlns:p="http://schemas.openxmlformats.org/presentationml/2006/main" xmlns:r="http://schemas.openxmlformats.org/officeDocument/2006/relationships">
+  <p:cSld>
+    <p:spTree>
+      <p:nvGrpSpPr>
+        <p:cNvPr id="1" name=""/>
+        <p:cNvGrpSpPr/>
+        <p:nvPr/>
+      </p:nvGrpSpPr>
+      <p:grpSpPr/>
+      <p:sp>
+        <p:nvSpPr>
+          <p:cNvPr id="2" name="TextBox 1"/>
+          <p:cNvSpPr txBox="1"/>
+          <p:nvPr/>
+        </p:nvSpPr>
+        <p:spPr>
+          <a:xfrm>
+            <a:off x="457200" y="274320"/>
+            <a:ext cx="8229600" cy="640080"/>
+          </a:xfrm>
+          <a:prstGeom prst="rect">
+            <a:avLst/>
+          </a:prstGeom>
+          <a:noFill/>
+        </p:spPr>
+        <p:txBody>
+          <a:bodyPr wrap="square">
+            <a:spAutoFit/>
+          </a:bodyPr>
+          <a:lstStyle/>
+          <a:p>
+            <a:r>
+              <a:rPr sz="2200" b="1">
+                <a:solidFill>
+                  <a:srgbClr val="0B3D2E"/>
+                </a:solidFill>
+              </a:rPr>
+              <a:t>Diagrama de la clase</a:t>
+            </a:r>
+          </a:p>
+        </p:txBody>
+      </p:sp>
+      <p:pic>
+        <p:nvPicPr>
+          <p:cNvPr id="3" name="Picture 2" descr="c79f8122280b5171.png"/>
+          <p:cNvPicPr>
+            <a:picLocks noChangeAspect="1"/>
+          </p:cNvPicPr>
+          <p:nvPr/>
+        </p:nvPicPr>
+        <p:blipFill>
+          <a:blip r:embed="rId2"/>
+          <a:stretch>
+            <a:fillRect/>
+          </a:stretch>
+        </p:blipFill>
+        <p:spPr>
+          <a:xfrm>
+            <a:off x="457200" y="1590607"/>
+            <a:ext cx="8229600" cy="4316866"/>
+          </a:xfrm>
+          <a:prstGeom prst="rect">
+            <a:avLst/>
+          </a:prstGeom>
+        </p:spPr>
+      </p:pic>
     </p:spTree>
   </p:cSld>
   <p:clrMapOvr>
@@ -3638,7 +3984,7 @@
                   <a:srgbClr val="22282E"/>
                 </a:solidFill>
               </a:rPr>
-              <a:t>•  Estudiar el malware que busca el sigilo máximo: rootkits (usuario y kernel) y bootkits que se cargan antes del sistema operativo. El alumno aprenderá las técnicas de ocultación (hooking, DKOM, filtros), por qué el análisis de memoria es imprescindible para detectarlos, y cómo el arranque seguro y las protecciones modernas cambian el panorama.</a:t>
+              <a:t>•  Estudiar el malware que busca el sigilo máximo: rootkits (usuario y kernel) y bootkits que se cargan antes del sistema operativo. El alumno aprenderá las técnicas de ocultación (hooking, DKOM…</a:t>
             </a:r>
           </a:p>
         </p:txBody>
@@ -4032,7 +4378,7 @@
                   <a:srgbClr val="0B3D2E"/>
                 </a:solidFill>
               </a:rPr>
-              <a:t>📖 Definiciones y características</a:t>
+              <a:t>🧠 Explicación en profundidad</a:t>
             </a:r>
           </a:p>
         </p:txBody>
@@ -4070,67 +4416,97 @@
                   <a:srgbClr val="22282E"/>
                 </a:solidFill>
               </a:rPr>
-              <a:t>•  Rootkit: malware que oculta su presencia al sistema. Característica clave: sigilo estructural.</a:t>
-            </a:r>
-          </a:p>
-          <a:p>
-            <a:pPr>
-              <a:spcAft>
-                <a:spcPts val="600"/>
-              </a:spcAft>
-            </a:pPr>
-            <a:r>
-              <a:rPr sz="1500">
-                <a:solidFill>
-                  <a:srgbClr val="22282E"/>
-                </a:solidFill>
-              </a:rPr>
-              <a:t>•  DKOM (Direct Kernel Object Manipulation): altera estructuras del kernel (p. ej. desenlaza un EPROCESS). Característica clave: oculta procesos sin hooks.</a:t>
-            </a:r>
-          </a:p>
-          <a:p>
-            <a:pPr>
-              <a:spcAft>
-                <a:spcPts val="600"/>
-              </a:spcAft>
-            </a:pPr>
-            <a:r>
-              <a:rPr sz="1500">
-                <a:solidFill>
-                  <a:srgbClr val="22282E"/>
-                </a:solidFill>
-              </a:rPr>
-              <a:t>•  SSDT hooking: intercepta llamadas del sistema. Característica clave: control de syscalls.</a:t>
-            </a:r>
-          </a:p>
-          <a:p>
-            <a:pPr>
-              <a:spcAft>
-                <a:spcPts val="600"/>
-              </a:spcAft>
-            </a:pPr>
-            <a:r>
-              <a:rPr sz="1500">
-                <a:solidFill>
-                  <a:srgbClr val="22282E"/>
-                </a:solidFill>
-              </a:rPr>
-              <a:t>•  Bootkit: infecta MBR/VBR/UEFI para cargarse antes del SO. Característica clave: persistencia pre-SO.</a:t>
-            </a:r>
-          </a:p>
-          <a:p>
-            <a:pPr>
-              <a:spcAft>
-                <a:spcPts val="600"/>
-              </a:spcAft>
-            </a:pPr>
-            <a:r>
-              <a:rPr sz="1500">
-                <a:solidFill>
-                  <a:srgbClr val="22282E"/>
-                </a:solidFill>
-              </a:rPr>
-              <a:t>•  BYOVD (Bring Your Own Vulnerable Driver): cargar un driver firmado vulnerable para entrar al kernel. Característica clave: evade la firma obligatoria.</a:t>
+              <a:t>•  Un rootkit es malware cuyo propósito primario es la ocultación: modifica el sistema operativo</a:t>
+            </a:r>
+          </a:p>
+          <a:p>
+            <a:pPr>
+              <a:spcAft>
+                <a:spcPts val="600"/>
+              </a:spcAft>
+            </a:pPr>
+            <a:r>
+              <a:rPr sz="1500">
+                <a:solidFill>
+                  <a:srgbClr val="22282E"/>
+                </a:solidFill>
+              </a:rPr>
+              <a:t>•  para que no pueda ver al malware —sus procesos, ficheros, claves de registro y conexiones se</a:t>
+            </a:r>
+          </a:p>
+          <a:p>
+            <a:pPr>
+              <a:spcAft>
+                <a:spcPts val="600"/>
+              </a:spcAft>
+            </a:pPr>
+            <a:r>
+              <a:rPr sz="1500">
+                <a:solidFill>
+                  <a:srgbClr val="22282E"/>
+                </a:solidFill>
+              </a:rPr>
+              <a:t>•  vuelven invisibles a las herramientas normales—. El nombre viene de "root" (privilegio máximo) más</a:t>
+            </a:r>
+          </a:p>
+          <a:p>
+            <a:pPr>
+              <a:spcAft>
+                <a:spcPts val="600"/>
+              </a:spcAft>
+            </a:pPr>
+            <a:r>
+              <a:rPr sz="1500">
+                <a:solidFill>
+                  <a:srgbClr val="22282E"/>
+                </a:solidFill>
+              </a:rPr>
+              <a:t>•  "kit". Su gravedad está en que compromete la confianza en el propio sistema: si el SO miente sobre</a:t>
+            </a:r>
+          </a:p>
+          <a:p>
+            <a:pPr>
+              <a:spcAft>
+                <a:spcPts val="600"/>
+              </a:spcAft>
+            </a:pPr>
+            <a:r>
+              <a:rPr sz="1500">
+                <a:solidFill>
+                  <a:srgbClr val="22282E"/>
+                </a:solidFill>
+              </a:rPr>
+              <a:t>•  qué procesos existen, ninguna herramienta que dependa del SO es fiable. La profundidad a la que opera</a:t>
+            </a:r>
+          </a:p>
+          <a:p>
+            <a:pPr>
+              <a:spcAft>
+                <a:spcPts val="600"/>
+              </a:spcAft>
+            </a:pPr>
+            <a:r>
+              <a:rPr sz="1500">
+                <a:solidFill>
+                  <a:srgbClr val="22282E"/>
+                </a:solidFill>
+              </a:rPr>
+              <a:t>•  un rootkit —espacio de usuario, kernel, o antes del arranque— determina lo difícil que es de detectar y</a:t>
+            </a:r>
+          </a:p>
+          <a:p>
+            <a:pPr>
+              <a:spcAft>
+                <a:spcPts val="600"/>
+              </a:spcAft>
+            </a:pPr>
+            <a:r>
+              <a:rPr sz="1500">
+                <a:solidFill>
+                  <a:srgbClr val="22282E"/>
+                </a:solidFill>
+              </a:rPr>
+              <a:t>•  de erradicar, y conecta directamente con la explotación de kernel de la Clase 139.</a:t>
             </a:r>
           </a:p>
         </p:txBody>
@@ -4181,7 +4557,7 @@
                   <a:srgbClr val="0B3D2E"/>
                 </a:solidFill>
               </a:rPr>
-              <a:t>🧰 Herramientas y preparación</a:t>
+              <a:t>📖 Definiciones y características</a:t>
             </a:r>
           </a:p>
         </p:txBody>
@@ -4219,52 +4595,67 @@
                   <a:srgbClr val="22282E"/>
                 </a:solidFill>
               </a:rPr>
-              <a:t>•  Volatility 3 (malfind, ssdt, driverscan, psxview, netscan).</a:t>
-            </a:r>
-          </a:p>
-          <a:p>
-            <a:pPr>
-              <a:spcAft>
-                <a:spcPts val="600"/>
-              </a:spcAft>
-            </a:pPr>
-            <a:r>
-              <a:rPr sz="1500">
-                <a:solidFill>
-                  <a:srgbClr val="22282E"/>
-                </a:solidFill>
-              </a:rPr>
-              <a:t>•  GMER/RootkitRevealer (conceptual) y comparación cross-view.</a:t>
-            </a:r>
-          </a:p>
-          <a:p>
-            <a:pPr>
-              <a:spcAft>
-                <a:spcPts val="600"/>
-              </a:spcAft>
-            </a:pPr>
-            <a:r>
-              <a:rPr sz="1500">
-                <a:solidFill>
-                  <a:srgbClr val="22282E"/>
-                </a:solidFill>
-              </a:rPr>
-              <a:t>•  PE-bear/Ghidra para drivers .sys.</a:t>
-            </a:r>
-          </a:p>
-          <a:p>
-            <a:pPr>
-              <a:spcAft>
-                <a:spcPts val="600"/>
-              </a:spcAft>
-            </a:pPr>
-            <a:r>
-              <a:rPr sz="1500">
-                <a:solidFill>
-                  <a:srgbClr val="22282E"/>
-                </a:solidFill>
-              </a:rPr>
-              <a:t>•  Referencias de arranque: UEFI spec, documentación de Secure Boot.</a:t>
+              <a:t>•  Rootkit: malware que oculta su presencia al sistema. Característica clave: sigilo estructural.</a:t>
+            </a:r>
+          </a:p>
+          <a:p>
+            <a:pPr>
+              <a:spcAft>
+                <a:spcPts val="600"/>
+              </a:spcAft>
+            </a:pPr>
+            <a:r>
+              <a:rPr sz="1500">
+                <a:solidFill>
+                  <a:srgbClr val="22282E"/>
+                </a:solidFill>
+              </a:rPr>
+              <a:t>•  DKOM (Direct Kernel Object Manipulation): altera estructuras del kernel (p. ej. desenlaza un EPROCESS). Característica clave: oculta procesos sin hooks.</a:t>
+            </a:r>
+          </a:p>
+          <a:p>
+            <a:pPr>
+              <a:spcAft>
+                <a:spcPts val="600"/>
+              </a:spcAft>
+            </a:pPr>
+            <a:r>
+              <a:rPr sz="1500">
+                <a:solidFill>
+                  <a:srgbClr val="22282E"/>
+                </a:solidFill>
+              </a:rPr>
+              <a:t>•  SSDT hooking: intercepta llamadas del sistema. Característica clave: control de syscalls.</a:t>
+            </a:r>
+          </a:p>
+          <a:p>
+            <a:pPr>
+              <a:spcAft>
+                <a:spcPts val="600"/>
+              </a:spcAft>
+            </a:pPr>
+            <a:r>
+              <a:rPr sz="1500">
+                <a:solidFill>
+                  <a:srgbClr val="22282E"/>
+                </a:solidFill>
+              </a:rPr>
+              <a:t>•  Bootkit: infecta MBR/VBR/UEFI para cargarse antes del SO. Característica clave: persistencia pre-SO.</a:t>
+            </a:r>
+          </a:p>
+          <a:p>
+            <a:pPr>
+              <a:spcAft>
+                <a:spcPts val="600"/>
+              </a:spcAft>
+            </a:pPr>
+            <a:r>
+              <a:rPr sz="1500">
+                <a:solidFill>
+                  <a:srgbClr val="22282E"/>
+                </a:solidFill>
+              </a:rPr>
+              <a:t>•  BYOVD (Bring Your Own Vulnerable Driver): cargar un driver firmado vulnerable para entrar al kernel. Característica clave: evade la firma obligatoria.</a:t>
             </a:r>
           </a:p>
         </p:txBody>
@@ -4315,7 +4706,7 @@
                   <a:srgbClr val="0B3D2E"/>
                 </a:solidFill>
               </a:rPr>
-              <a:t>🧪 Laboratorio guiado</a:t>
+              <a:t>📔 Glosario</a:t>
             </a:r>
           </a:p>
         </p:txBody>
@@ -4353,97 +4744,97 @@
                   <a:srgbClr val="22282E"/>
                 </a:solidFill>
               </a:rPr>
-              <a:t>•  Restaura base-clean. Captura un volcado de memoria de referencia (limpio) para comparar.</a:t>
-            </a:r>
-          </a:p>
-          <a:p>
-            <a:pPr>
-              <a:spcAft>
-                <a:spcPts val="600"/>
-              </a:spcAft>
-            </a:pPr>
-            <a:r>
-              <a:rPr sz="1500">
-                <a:solidFill>
-                  <a:srgbClr val="22282E"/>
-                </a:solidFill>
-              </a:rPr>
-              <a:t>•  Detona una muestra con capacidad de ocultación (o usa un caso de estudio con memoria provista) y captura RAM.</a:t>
-            </a:r>
-          </a:p>
-          <a:p>
-            <a:pPr>
-              <a:spcAft>
-                <a:spcPts val="600"/>
-              </a:spcAft>
-            </a:pPr>
-            <a:r>
-              <a:rPr sz="1500">
-                <a:solidFill>
-                  <a:srgbClr val="22282E"/>
-                </a:solidFill>
-              </a:rPr>
-              <a:t>•  Con Volatility, ejecuta windows.psxview: compara las distintas fuentes de procesos; un proceso presente en una lista y ausente en otra sugiere DKOM.</a:t>
-            </a:r>
-          </a:p>
-          <a:p>
-            <a:pPr>
-              <a:spcAft>
-                <a:spcPts val="600"/>
-              </a:spcAft>
-            </a:pPr>
-            <a:r>
-              <a:rPr sz="1500">
-                <a:solidFill>
-                  <a:srgbClr val="22282E"/>
-                </a:solidFill>
-              </a:rPr>
-              <a:t>•  Revisa windows.ssdt para entradas que no apunten a ntoskrnl/win32k (posible SSDT hook).</a:t>
-            </a:r>
-          </a:p>
-          <a:p>
-            <a:pPr>
-              <a:spcAft>
-                <a:spcPts val="600"/>
-              </a:spcAft>
-            </a:pPr>
-            <a:r>
-              <a:rPr sz="1500">
-                <a:solidFill>
-                  <a:srgbClr val="22282E"/>
-                </a:solidFill>
-              </a:rPr>
-              <a:t>•  Usa windows.driverscan/modules para hallar drivers no firmados o sospechosos; extrae el .sys y analízalo en Ghidra.</a:t>
-            </a:r>
-          </a:p>
-          <a:p>
-            <a:pPr>
-              <a:spcAft>
-                <a:spcPts val="600"/>
-              </a:spcAft>
-            </a:pPr>
-            <a:r>
-              <a:rPr sz="1500">
-                <a:solidFill>
-                  <a:srgbClr val="22282E"/>
-                </a:solidFill>
-              </a:rPr>
-              <a:t>•  Con windows.netscan, busca conexiones que las herramientas en vivo no mostraban (ocultación de red).</a:t>
-            </a:r>
-          </a:p>
-          <a:p>
-            <a:pPr>
-              <a:spcAft>
-                <a:spcPts val="600"/>
-              </a:spcAft>
-            </a:pPr>
-            <a:r>
-              <a:rPr sz="1500">
-                <a:solidFill>
-                  <a:srgbClr val="22282E"/>
-                </a:solidFill>
-              </a:rPr>
-              <a:t>•  Si es un bootkit, examina el MBR/VBR o la partición EFI en busca de modificaciones; documenta el vector de arranque.</a:t>
+              <a:t>•  Término — Definición concisa</a:t>
+            </a:r>
+          </a:p>
+          <a:p>
+            <a:pPr>
+              <a:spcAft>
+                <a:spcPts val="600"/>
+              </a:spcAft>
+            </a:pPr>
+            <a:r>
+              <a:rPr sz="1500">
+                <a:solidFill>
+                  <a:srgbClr val="22282E"/>
+                </a:solidFill>
+              </a:rPr>
+              <a:t>•  Rootkit — Malware cuyo fin es ocultarse manipulando el SO</a:t>
+            </a:r>
+          </a:p>
+          <a:p>
+            <a:pPr>
+              <a:spcAft>
+                <a:spcPts val="600"/>
+              </a:spcAft>
+            </a:pPr>
+            <a:r>
+              <a:rPr sz="1500">
+                <a:solidFill>
+                  <a:srgbClr val="22282E"/>
+                </a:solidFill>
+              </a:rPr>
+              <a:t>•  API hooking — Interceptar llamadas para filtrar los resultados</a:t>
+            </a:r>
+          </a:p>
+          <a:p>
+            <a:pPr>
+              <a:spcAft>
+                <a:spcPts val="600"/>
+              </a:spcAft>
+            </a:pPr>
+            <a:r>
+              <a:rPr sz="1500">
+                <a:solidFill>
+                  <a:srgbClr val="22282E"/>
+                </a:solidFill>
+              </a:rPr>
+              <a:t>•  Rootkit de usuario — Opera en ring 3; más fácil de detectar</a:t>
+            </a:r>
+          </a:p>
+          <a:p>
+            <a:pPr>
+              <a:spcAft>
+                <a:spcPts val="600"/>
+              </a:spcAft>
+            </a:pPr>
+            <a:r>
+              <a:rPr sz="1500">
+                <a:solidFill>
+                  <a:srgbClr val="22282E"/>
+                </a:solidFill>
+              </a:rPr>
+              <a:t>•  Rootkit de kernel — Opera en ring 0; manipula el núcleo</a:t>
+            </a:r>
+          </a:p>
+          <a:p>
+            <a:pPr>
+              <a:spcAft>
+                <a:spcPts val="600"/>
+              </a:spcAft>
+            </a:pPr>
+            <a:r>
+              <a:rPr sz="1500">
+                <a:solidFill>
+                  <a:srgbClr val="22282E"/>
+                </a:solidFill>
+              </a:rPr>
+              <a:t>•  SSDT hooking — Interceptar las llamadas al sistema en su raíz</a:t>
+            </a:r>
+          </a:p>
+          <a:p>
+            <a:pPr>
+              <a:spcAft>
+                <a:spcPts val="600"/>
+              </a:spcAft>
+            </a:pPr>
+            <a:r>
+              <a:rPr sz="1500">
+                <a:solidFill>
+                  <a:srgbClr val="22282E"/>
+                </a:solidFill>
+              </a:rPr>
+              <a:t>•  DKOM — Modificar directamente las estructuras del kernel</a:t>
             </a:r>
           </a:p>
         </p:txBody>
@@ -4494,7 +4885,7 @@
                   <a:srgbClr val="0B3D2E"/>
                 </a:solidFill>
               </a:rPr>
-              <a:t>✍️ Ejercicios</a:t>
+              <a:t>🧰 Herramientas y preparación</a:t>
             </a:r>
           </a:p>
         </p:txBody>
@@ -4532,82 +4923,52 @@
                   <a:srgbClr val="22282E"/>
                 </a:solidFill>
               </a:rPr>
-              <a:t>•  Explica la diferencia práctica entre un hook inline y DKOM.</a:t>
-            </a:r>
-          </a:p>
-          <a:p>
-            <a:pPr>
-              <a:spcAft>
-                <a:spcPts val="600"/>
-              </a:spcAft>
-            </a:pPr>
-            <a:r>
-              <a:rPr sz="1500">
-                <a:solidFill>
-                  <a:srgbClr val="22282E"/>
-                </a:solidFill>
-              </a:rPr>
-              <a:t>•  Interpreta un psxview con discrepancias y concluye qué está oculto.</a:t>
-            </a:r>
-          </a:p>
-          <a:p>
-            <a:pPr>
-              <a:spcAft>
-                <a:spcPts val="600"/>
-              </a:spcAft>
-            </a:pPr>
-            <a:r>
-              <a:rPr sz="1500">
-                <a:solidFill>
-                  <a:srgbClr val="22282E"/>
-                </a:solidFill>
-              </a:rPr>
-              <a:t>•  Analiza un driver .sys y localiza su rutina de ocultación.</a:t>
-            </a:r>
-          </a:p>
-          <a:p>
-            <a:pPr>
-              <a:spcAft>
-                <a:spcPts val="600"/>
-              </a:spcAft>
-            </a:pPr>
-            <a:r>
-              <a:rPr sz="1500">
-                <a:solidFill>
-                  <a:srgbClr val="22282E"/>
-                </a:solidFill>
-              </a:rPr>
-              <a:t>•  Describe cómo Secure Boot frena los bootkits UEFI.</a:t>
-            </a:r>
-          </a:p>
-          <a:p>
-            <a:pPr>
-              <a:spcAft>
-                <a:spcPts val="600"/>
-              </a:spcAft>
-            </a:pPr>
-            <a:r>
-              <a:rPr sz="1500">
-                <a:solidFill>
-                  <a:srgbClr val="22282E"/>
-                </a:solidFill>
-              </a:rPr>
-              <a:t>•  Explica BYOVD y por qué sigue funcionando pese a la firma obligatoria.</a:t>
-            </a:r>
-          </a:p>
-          <a:p>
-            <a:pPr>
-              <a:spcAft>
-                <a:spcPts val="600"/>
-              </a:spcAft>
-            </a:pPr>
-            <a:r>
-              <a:rPr sz="1500">
-                <a:solidFill>
-                  <a:srgbClr val="22282E"/>
-                </a:solidFill>
-              </a:rPr>
-              <a:t>•  Diseña una detección de carga de drivers vulnerables conocidos.</a:t>
+              <a:t>•  Volatility 3 (malfind, ssdt, driverscan, psxview, netscan).</a:t>
+            </a:r>
+          </a:p>
+          <a:p>
+            <a:pPr>
+              <a:spcAft>
+                <a:spcPts val="600"/>
+              </a:spcAft>
+            </a:pPr>
+            <a:r>
+              <a:rPr sz="1500">
+                <a:solidFill>
+                  <a:srgbClr val="22282E"/>
+                </a:solidFill>
+              </a:rPr>
+              <a:t>•  GMER/RootkitRevealer (conceptual) y comparación cross-view.</a:t>
+            </a:r>
+          </a:p>
+          <a:p>
+            <a:pPr>
+              <a:spcAft>
+                <a:spcPts val="600"/>
+              </a:spcAft>
+            </a:pPr>
+            <a:r>
+              <a:rPr sz="1500">
+                <a:solidFill>
+                  <a:srgbClr val="22282E"/>
+                </a:solidFill>
+              </a:rPr>
+              <a:t>•  PE-bear/Ghidra para drivers .sys.</a:t>
+            </a:r>
+          </a:p>
+          <a:p>
+            <a:pPr>
+              <a:spcAft>
+                <a:spcPts val="600"/>
+              </a:spcAft>
+            </a:pPr>
+            <a:r>
+              <a:rPr sz="1500">
+                <a:solidFill>
+                  <a:srgbClr val="22282E"/>
+                </a:solidFill>
+              </a:rPr>
+              <a:t>•  Referencias de arranque: UEFI spec, documentación de Secure Boot.</a:t>
             </a:r>
           </a:p>
         </p:txBody>
@@ -4658,7 +5019,7 @@
                   <a:srgbClr val="0B3D2E"/>
                 </a:solidFill>
               </a:rPr>
-              <a:t>📝 Reto verificable</a:t>
+              <a:t>🧪 Laboratorio guiado</a:t>
             </a:r>
           </a:p>
         </p:txBody>
@@ -4696,22 +5057,97 @@
                   <a:srgbClr val="22282E"/>
                 </a:solidFill>
               </a:rPr>
-              <a:t>•  Entrega un informe de rootkit identificando la técnica de ocultación con evidencia de memoria (cross-view/SSDT/driverscan), el artefacto oculto (proceso/conexión/driver) y una recomendación de detección.</a:t>
-            </a:r>
-          </a:p>
-          <a:p>
-            <a:pPr>
-              <a:spcAft>
-                <a:spcPts val="600"/>
-              </a:spcAft>
-            </a:pPr>
-            <a:r>
-              <a:rPr sz="1500">
-                <a:solidFill>
-                  <a:srgbClr val="22282E"/>
-                </a:solidFill>
-              </a:rPr>
-              <a:t>•  Criterio de aceptación: el informe muestra al menos una discrepancia cross-view o un hook/driver anómalo con la salida de Volatility que lo respalda, y explica por qué el análisis en disco/vivo no bastaba.</a:t>
+              <a:t>•  Restaura base-clean. Captura un volcado de memoria de referencia (limpio) para comparar.</a:t>
+            </a:r>
+          </a:p>
+          <a:p>
+            <a:pPr>
+              <a:spcAft>
+                <a:spcPts val="600"/>
+              </a:spcAft>
+            </a:pPr>
+            <a:r>
+              <a:rPr sz="1500">
+                <a:solidFill>
+                  <a:srgbClr val="22282E"/>
+                </a:solidFill>
+              </a:rPr>
+              <a:t>•  Detona una muestra con capacidad de ocultación (o usa un caso de estudio con memoria provista) y captura RAM.</a:t>
+            </a:r>
+          </a:p>
+          <a:p>
+            <a:pPr>
+              <a:spcAft>
+                <a:spcPts val="600"/>
+              </a:spcAft>
+            </a:pPr>
+            <a:r>
+              <a:rPr sz="1500">
+                <a:solidFill>
+                  <a:srgbClr val="22282E"/>
+                </a:solidFill>
+              </a:rPr>
+              <a:t>•  Con Volatility, ejecuta windows.psxview: compara las distintas fuentes de procesos; un proceso presente en una lista y ausente en otra sugiere DKOM.</a:t>
+            </a:r>
+          </a:p>
+          <a:p>
+            <a:pPr>
+              <a:spcAft>
+                <a:spcPts val="600"/>
+              </a:spcAft>
+            </a:pPr>
+            <a:r>
+              <a:rPr sz="1500">
+                <a:solidFill>
+                  <a:srgbClr val="22282E"/>
+                </a:solidFill>
+              </a:rPr>
+              <a:t>•  Revisa windows.ssdt para entradas que no apunten a ntoskrnl/win32k (posible SSDT hook).</a:t>
+            </a:r>
+          </a:p>
+          <a:p>
+            <a:pPr>
+              <a:spcAft>
+                <a:spcPts val="600"/>
+              </a:spcAft>
+            </a:pPr>
+            <a:r>
+              <a:rPr sz="1500">
+                <a:solidFill>
+                  <a:srgbClr val="22282E"/>
+                </a:solidFill>
+              </a:rPr>
+              <a:t>•  Usa windows.driverscan/modules para hallar drivers no firmados o sospechosos; extrae el .sys y analízalo en Ghidra.</a:t>
+            </a:r>
+          </a:p>
+          <a:p>
+            <a:pPr>
+              <a:spcAft>
+                <a:spcPts val="600"/>
+              </a:spcAft>
+            </a:pPr>
+            <a:r>
+              <a:rPr sz="1500">
+                <a:solidFill>
+                  <a:srgbClr val="22282E"/>
+                </a:solidFill>
+              </a:rPr>
+              <a:t>•  Con windows.netscan, busca conexiones que las herramientas en vivo no mostraban (ocultación de red).</a:t>
+            </a:r>
+          </a:p>
+          <a:p>
+            <a:pPr>
+              <a:spcAft>
+                <a:spcPts val="600"/>
+              </a:spcAft>
+            </a:pPr>
+            <a:r>
+              <a:rPr sz="1500">
+                <a:solidFill>
+                  <a:srgbClr val="22282E"/>
+                </a:solidFill>
+              </a:rPr>
+              <a:t>•  Si es un bootkit, examina el MBR/VBR o la partición EFI en busca de modificaciones; documenta el vector de arranque.</a:t>
             </a:r>
           </a:p>
         </p:txBody>
